--- a/exports/pitchbooks/MSFT_Institutional_Pitchbook.pptx
+++ b/exports/pitchbooks/MSFT_Institutional_Pitchbook.pptx
@@ -3146,7 +3146,7 @@
               </a:defRPr>
             </a:pPr>
             <a:r>
-              <a:t>Automated Swarm Analysis &amp; Financial Valuation Deck | August 18, 2026</a:t>
+              <a:t>Automated Swarm Analysis &amp; Financial Valuation Deck | August 19, 2026</a:t>
             </a:r>
           </a:p>
         </p:txBody>
@@ -3250,11 +3250,11 @@
             </a:r>
             <a:br/>
             <a:r>
-              <a:t>Key Profile: SEC EDGAR Company profile and CIK mapping resource for ticker: MSFT</a:t>
+              <a:t>Key Profile: Hyperscale Cloud &amp; AI Leader</a:t>
             </a:r>
             <a:br/>
             <a:r>
-              <a:t>Risk Rating: Low Risk (Score: 15.0/100).</a:t>
+              <a:t>Risk Rating: Low Risk (Score: 10.0/100).</a:t>
             </a:r>
           </a:p>
         </p:txBody>
@@ -3439,7 +3439,7 @@
                         </a:defRPr>
                       </a:pPr>
                       <a:r>
-                        <a:t>24.6%</a:t>
+                        <a:t>36.0%</a:t>
                       </a:r>
                     </a:p>
                   </a:txBody>
@@ -3498,7 +3498,7 @@
                         </a:defRPr>
                       </a:pPr>
                       <a:r>
-                        <a:t>28.4x</a:t>
+                        <a:t>Nonex</a:t>
                       </a:r>
                     </a:p>
                   </a:txBody>
@@ -3557,7 +3557,7 @@
                         </a:defRPr>
                       </a:pPr>
                       <a:r>
-                        <a:t>22.1x</a:t>
+                        <a:t>Nonex</a:t>
                       </a:r>
                     </a:p>
                   </a:txBody>
@@ -3616,7 +3616,7 @@
                         </a:defRPr>
                       </a:pPr>
                       <a:r>
-                        <a:t>15.0 / 100</a:t>
+                        <a:t>10.0 / 100</a:t>
                       </a:r>
                     </a:p>
                   </a:txBody>
@@ -3741,7 +3741,7 @@
               </a:defRPr>
             </a:pPr>
             <a:r>
-              <a:t>Direction: BULLISH_EXPANSION | Momentum Score: 0.72</a:t>
+              <a:t>Direction: NEUTRAL_STABILITY | Momentum Score: 0.0</a:t>
             </a:r>
           </a:p>
           <a:p>
@@ -3874,11 +3874,11 @@
               </a:defRPr>
             </a:pPr>
             <a:r>
-              <a:t>• Graph Nodes Committed: 1</a:t>
+              <a:t>• Graph Nodes Committed: 6</a:t>
             </a:r>
             <a:br/>
             <a:r>
-              <a:t>• Relationships Built: 0</a:t>
+              <a:t>• Relationships Built: 5</a:t>
             </a:r>
             <a:br/>
             <a:r>
